--- a/data-eng/decks/w1d2s3.pptx
+++ b/data-eng/decks/w1d2s3.pptx
@@ -3100,7 +3100,7 @@
       <p:grpSpPr/>
       <p:sp>
         <p:nvSpPr>
-          <p:cNvPr id="2" name="Oval 1"/>
+          <p:cNvPr id="2" name="deckgen:decor"/>
           <p:cNvSpPr/>
           <p:nvPr/>
         </p:nvSpPr>
@@ -3130,7 +3130,7 @@
       </p:sp>
       <p:sp>
         <p:nvSpPr>
-          <p:cNvPr id="3" name="Oval 2"/>
+          <p:cNvPr id="3" name="deckgen:decor"/>
           <p:cNvSpPr/>
           <p:nvPr/>
         </p:nvSpPr>
@@ -3160,7 +3160,7 @@
       </p:sp>
       <p:sp>
         <p:nvSpPr>
-          <p:cNvPr id="4" name="Oval 3"/>
+          <p:cNvPr id="4" name="deckgen:decor"/>
           <p:cNvSpPr/>
           <p:nvPr/>
         </p:nvSpPr>
@@ -3190,7 +3190,7 @@
       </p:sp>
       <p:sp>
         <p:nvSpPr>
-          <p:cNvPr id="5" name="Rectangle 4"/>
+          <p:cNvPr id="5" name="deckgen:decor"/>
           <p:cNvSpPr/>
           <p:nvPr/>
         </p:nvSpPr>
@@ -3220,7 +3220,7 @@
       </p:sp>
       <p:sp>
         <p:nvSpPr>
-          <p:cNvPr id="6" name="Oval 5"/>
+          <p:cNvPr id="6" name="deckgen:decor"/>
           <p:cNvSpPr/>
           <p:nvPr/>
         </p:nvSpPr>
@@ -3250,7 +3250,7 @@
       </p:sp>
       <p:sp>
         <p:nvSpPr>
-          <p:cNvPr id="7" name="Oval 6"/>
+          <p:cNvPr id="7" name="deckgen:decor"/>
           <p:cNvSpPr/>
           <p:nvPr/>
         </p:nvSpPr>
@@ -3280,7 +3280,7 @@
       </p:sp>
       <p:sp>
         <p:nvSpPr>
-          <p:cNvPr id="8" name="Oval 7"/>
+          <p:cNvPr id="8" name="deckgen:decor"/>
           <p:cNvSpPr/>
           <p:nvPr/>
         </p:nvSpPr>
@@ -3310,7 +3310,7 @@
       </p:sp>
       <p:sp>
         <p:nvSpPr>
-          <p:cNvPr id="9" name="Oval 8"/>
+          <p:cNvPr id="9" name="deckgen:decor"/>
           <p:cNvSpPr/>
           <p:nvPr/>
         </p:nvSpPr>
@@ -3340,7 +3340,7 @@
       </p:sp>
       <p:sp>
         <p:nvSpPr>
-          <p:cNvPr id="10" name="Rectangle 9"/>
+          <p:cNvPr id="10" name="deckgen:decor"/>
           <p:cNvSpPr/>
           <p:nvPr/>
         </p:nvSpPr>
@@ -3600,7 +3600,7 @@
       <p:grpSpPr/>
       <p:sp>
         <p:nvSpPr>
-          <p:cNvPr id="2" name="Oval 1"/>
+          <p:cNvPr id="2" name="deckgen:decor"/>
           <p:cNvSpPr/>
           <p:nvPr/>
         </p:nvSpPr>
@@ -3630,7 +3630,7 @@
       </p:sp>
       <p:sp>
         <p:nvSpPr>
-          <p:cNvPr id="3" name="Oval 2"/>
+          <p:cNvPr id="3" name="deckgen:decor"/>
           <p:cNvSpPr/>
           <p:nvPr/>
         </p:nvSpPr>
@@ -3660,7 +3660,7 @@
       </p:sp>
       <p:sp>
         <p:nvSpPr>
-          <p:cNvPr id="4" name="Oval 3"/>
+          <p:cNvPr id="4" name="deckgen:decor"/>
           <p:cNvSpPr/>
           <p:nvPr/>
         </p:nvSpPr>
@@ -4662,7 +4662,7 @@
       <p:grpSpPr/>
       <p:sp>
         <p:nvSpPr>
-          <p:cNvPr id="2" name="Oval 1"/>
+          <p:cNvPr id="2" name="deckgen:decor"/>
           <p:cNvSpPr/>
           <p:nvPr/>
         </p:nvSpPr>
@@ -4692,7 +4692,7 @@
       </p:sp>
       <p:sp>
         <p:nvSpPr>
-          <p:cNvPr id="3" name="Oval 2"/>
+          <p:cNvPr id="3" name="deckgen:decor"/>
           <p:cNvSpPr/>
           <p:nvPr/>
         </p:nvSpPr>
@@ -5469,7 +5469,7 @@
       <p:grpSpPr/>
       <p:sp>
         <p:nvSpPr>
-          <p:cNvPr id="2" name="Oval 1"/>
+          <p:cNvPr id="2" name="deckgen:decor"/>
           <p:cNvSpPr/>
           <p:nvPr/>
         </p:nvSpPr>
@@ -5499,7 +5499,7 @@
       </p:sp>
       <p:sp>
         <p:nvSpPr>
-          <p:cNvPr id="3" name="Oval 2"/>
+          <p:cNvPr id="3" name="deckgen:decor"/>
           <p:cNvSpPr/>
           <p:nvPr/>
         </p:nvSpPr>
@@ -5529,7 +5529,7 @@
       </p:sp>
       <p:sp>
         <p:nvSpPr>
-          <p:cNvPr id="4" name="Oval 3"/>
+          <p:cNvPr id="4" name="deckgen:decor"/>
           <p:cNvSpPr/>
           <p:nvPr/>
         </p:nvSpPr>
@@ -6460,7 +6460,7 @@
       <p:grpSpPr/>
       <p:sp>
         <p:nvSpPr>
-          <p:cNvPr id="2" name="Oval 1"/>
+          <p:cNvPr id="2" name="deckgen:decor"/>
           <p:cNvSpPr/>
           <p:nvPr/>
         </p:nvSpPr>
@@ -6490,7 +6490,7 @@
       </p:sp>
       <p:sp>
         <p:nvSpPr>
-          <p:cNvPr id="3" name="Oval 2"/>
+          <p:cNvPr id="3" name="deckgen:decor"/>
           <p:cNvSpPr/>
           <p:nvPr/>
         </p:nvSpPr>
@@ -6520,7 +6520,7 @@
       </p:sp>
       <p:sp>
         <p:nvSpPr>
-          <p:cNvPr id="4" name="Oval 3"/>
+          <p:cNvPr id="4" name="deckgen:decor"/>
           <p:cNvSpPr/>
           <p:nvPr/>
         </p:nvSpPr>
@@ -6801,7 +6801,7 @@
                 <a:ea typeface="Pretendard"/>
                 <a:cs typeface="Pretendard"/>
               </a:rPr>
-              <a:t>1 · count_errors.sh</a:t>
+              <a:t>1. count_errors.sh</a:t>
             </a:r>
           </a:p>
         </p:txBody>
@@ -6947,7 +6947,7 @@
                 <a:ea typeface="Pretendard"/>
                 <a:cs typeface="Pretendard"/>
               </a:rPr>
-              <a:t>2 · backup.sh</a:t>
+              <a:t>2. backup.sh</a:t>
             </a:r>
           </a:p>
         </p:txBody>
@@ -7093,7 +7093,7 @@
                 <a:ea typeface="Pretendard"/>
                 <a:cs typeface="Pretendard"/>
               </a:rPr>
-              <a:t>3 · daily_report.sh</a:t>
+              <a:t>3. daily_report.sh</a:t>
             </a:r>
           </a:p>
         </p:txBody>
@@ -7239,7 +7239,7 @@
                 <a:ea typeface="Pretendard"/>
                 <a:cs typeface="Pretendard"/>
               </a:rPr>
-              <a:t>4 · cron 맛보기</a:t>
+              <a:t>4. cron 맛보기</a:t>
             </a:r>
           </a:p>
         </p:txBody>
@@ -7385,7 +7385,7 @@
                 <a:ea typeface="Pretendard"/>
                 <a:cs typeface="Pretendard"/>
               </a:rPr>
-              <a:t>5 · 미니 과제</a:t>
+              <a:t>5. 미니 과제</a:t>
             </a:r>
           </a:p>
         </p:txBody>
@@ -7563,7 +7563,7 @@
       <p:grpSpPr/>
       <p:sp>
         <p:nvSpPr>
-          <p:cNvPr id="2" name="Oval 1"/>
+          <p:cNvPr id="2" name="deckgen:decor"/>
           <p:cNvSpPr/>
           <p:nvPr/>
         </p:nvSpPr>
@@ -7593,7 +7593,7 @@
       </p:sp>
       <p:sp>
         <p:nvSpPr>
-          <p:cNvPr id="3" name="Oval 2"/>
+          <p:cNvPr id="3" name="deckgen:decor"/>
           <p:cNvSpPr/>
           <p:nvPr/>
         </p:nvSpPr>
@@ -7623,7 +7623,7 @@
       </p:sp>
       <p:sp>
         <p:nvSpPr>
-          <p:cNvPr id="4" name="Oval 3"/>
+          <p:cNvPr id="4" name="deckgen:decor"/>
           <p:cNvSpPr/>
           <p:nvPr/>
         </p:nvSpPr>
@@ -9274,7 +9274,7 @@
       <p:grpSpPr/>
       <p:sp>
         <p:nvSpPr>
-          <p:cNvPr id="2" name="Oval 1"/>
+          <p:cNvPr id="2" name="deckgen:decor"/>
           <p:cNvSpPr/>
           <p:nvPr/>
         </p:nvSpPr>
@@ -9304,7 +9304,7 @@
       </p:sp>
       <p:sp>
         <p:nvSpPr>
-          <p:cNvPr id="3" name="Oval 2"/>
+          <p:cNvPr id="3" name="deckgen:decor"/>
           <p:cNvSpPr/>
           <p:nvPr/>
         </p:nvSpPr>
@@ -9334,7 +9334,7 @@
       </p:sp>
       <p:sp>
         <p:nvSpPr>
-          <p:cNvPr id="4" name="Oval 3"/>
+          <p:cNvPr id="4" name="deckgen:decor"/>
           <p:cNvSpPr/>
           <p:nvPr/>
         </p:nvSpPr>
@@ -10488,7 +10488,7 @@
       <p:grpSpPr/>
       <p:sp>
         <p:nvSpPr>
-          <p:cNvPr id="2" name="Oval 1"/>
+          <p:cNvPr id="2" name="deckgen:decor"/>
           <p:cNvSpPr/>
           <p:nvPr/>
         </p:nvSpPr>
@@ -10518,7 +10518,7 @@
       </p:sp>
       <p:sp>
         <p:nvSpPr>
-          <p:cNvPr id="3" name="Oval 2"/>
+          <p:cNvPr id="3" name="deckgen:decor"/>
           <p:cNvSpPr/>
           <p:nvPr/>
         </p:nvSpPr>
@@ -10548,7 +10548,7 @@
       </p:sp>
       <p:sp>
         <p:nvSpPr>
-          <p:cNvPr id="4" name="Oval 3"/>
+          <p:cNvPr id="4" name="deckgen:decor"/>
           <p:cNvSpPr/>
           <p:nvPr/>
         </p:nvSpPr>
@@ -11876,7 +11876,7 @@
       <p:grpSpPr/>
       <p:sp>
         <p:nvSpPr>
-          <p:cNvPr id="2" name="Oval 1"/>
+          <p:cNvPr id="2" name="deckgen:decor"/>
           <p:cNvSpPr/>
           <p:nvPr/>
         </p:nvSpPr>
@@ -11906,7 +11906,7 @@
       </p:sp>
       <p:sp>
         <p:nvSpPr>
-          <p:cNvPr id="3" name="Oval 2"/>
+          <p:cNvPr id="3" name="deckgen:decor"/>
           <p:cNvSpPr/>
           <p:nvPr/>
         </p:nvSpPr>
@@ -11936,7 +11936,7 @@
       </p:sp>
       <p:sp>
         <p:nvSpPr>
-          <p:cNvPr id="4" name="Oval 3"/>
+          <p:cNvPr id="4" name="deckgen:decor"/>
           <p:cNvSpPr/>
           <p:nvPr/>
         </p:nvSpPr>
@@ -13137,7 +13137,7 @@
       <p:grpSpPr/>
       <p:sp>
         <p:nvSpPr>
-          <p:cNvPr id="2" name="Oval 1"/>
+          <p:cNvPr id="2" name="deckgen:decor"/>
           <p:cNvSpPr/>
           <p:nvPr/>
         </p:nvSpPr>
@@ -13167,7 +13167,7 @@
       </p:sp>
       <p:sp>
         <p:nvSpPr>
-          <p:cNvPr id="3" name="Oval 2"/>
+          <p:cNvPr id="3" name="deckgen:decor"/>
           <p:cNvSpPr/>
           <p:nvPr/>
         </p:nvSpPr>
@@ -13197,7 +13197,7 @@
       </p:sp>
       <p:sp>
         <p:nvSpPr>
-          <p:cNvPr id="4" name="Oval 3"/>
+          <p:cNvPr id="4" name="deckgen:decor"/>
           <p:cNvSpPr/>
           <p:nvPr/>
         </p:nvSpPr>
@@ -14351,7 +14351,7 @@
       <p:grpSpPr/>
       <p:sp>
         <p:nvSpPr>
-          <p:cNvPr id="2" name="Oval 1"/>
+          <p:cNvPr id="2" name="deckgen:decor"/>
           <p:cNvSpPr/>
           <p:nvPr/>
         </p:nvSpPr>
@@ -14381,7 +14381,7 @@
       </p:sp>
       <p:sp>
         <p:nvSpPr>
-          <p:cNvPr id="3" name="Oval 2"/>
+          <p:cNvPr id="3" name="deckgen:decor"/>
           <p:cNvSpPr/>
           <p:nvPr/>
         </p:nvSpPr>
@@ -14411,7 +14411,7 @@
       </p:sp>
       <p:sp>
         <p:nvSpPr>
-          <p:cNvPr id="4" name="Oval 3"/>
+          <p:cNvPr id="4" name="deckgen:decor"/>
           <p:cNvSpPr/>
           <p:nvPr/>
         </p:nvSpPr>
